--- a/public/fun/cards/public/public-01.pptx
+++ b/public/fun/cards/public/public-01.pptx
@@ -3085,7 +3085,7 @@
     <p:bg>
       <p:bgPr>
         <a:solidFill>
-          <a:srgbClr val="314149"/>
+          <a:srgbClr val="FF9E6B"/>
         </a:solidFill>
         <a:effectLst/>
       </p:bgPr>
@@ -3099,20 +3099,60 @@
       <p:grpSpPr/>
       <p:sp>
         <p:nvSpPr>
-          <p:cNvPr id="2" name="Rectangle 1"/>
-          <p:cNvSpPr/>
+          <p:cNvPr id="2" name="텍스트"/>
+          <p:cNvSpPr txBox="1"/>
           <p:nvPr/>
         </p:nvSpPr>
         <p:spPr>
           <a:xfrm>
-            <a:off x="0" y="0"/>
-            <a:ext cx="165600" cy="1800000"/>
+            <a:off x="252000" y="223200"/>
+            <a:ext cx="2016000" cy="133351"/>
           </a:xfrm>
           <a:prstGeom prst="rect">
             <a:avLst/>
           </a:prstGeom>
+          <a:noFill/>
+        </p:spPr>
+        <p:txBody>
+          <a:bodyPr wrap="square" lIns="0" rIns="0" tIns="0" bIns="0" anchor="t">
+            <a:spAutoFit/>
+          </a:bodyPr>
+          <a:lstStyle/>
+          <a:p>
+            <a:pPr algn="l">
+              <a:lnSpc>
+                <a:spcPts val="1015"/>
+              </a:lnSpc>
+            </a:pPr>
+            <a:r>
+              <a:rPr sz="700" b="1" spc="200">
+                <a:solidFill>
+                  <a:srgbClr val="46332D"/>
+                </a:solidFill>
+                <a:latin typeface="맑은 고딕"/>
+                <a:ea typeface="맑은 고딕"/>
+              </a:rPr>
+              <a:t>기관명 · 부서명</a:t>
+            </a:r>
+          </a:p>
+        </p:txBody>
+      </p:sp>
+      <p:sp>
+        <p:nvSpPr>
+          <p:cNvPr id="3" name="Oval 2"/>
+          <p:cNvSpPr/>
+          <p:nvPr/>
+        </p:nvSpPr>
+        <p:spPr>
+          <a:xfrm>
+            <a:off x="2955600" y="241200"/>
+            <a:ext cx="64800" cy="64800"/>
+          </a:xfrm>
+          <a:prstGeom prst="ellipse">
+            <a:avLst/>
+          </a:prstGeom>
           <a:solidFill>
-            <a:srgbClr val="889EA9"/>
+            <a:srgbClr val="12151C"/>
           </a:solidFill>
           <a:ln>
             <a:noFill/>
@@ -3128,110 +3168,84 @@
       </p:sp>
       <p:sp>
         <p:nvSpPr>
-          <p:cNvPr id="3" name="Rectangle 2"/>
-          <p:cNvSpPr/>
+          <p:cNvPr id="4" name="텍스트"/>
+          <p:cNvSpPr txBox="1"/>
           <p:nvPr/>
         </p:nvSpPr>
         <p:spPr>
           <a:xfrm>
-            <a:off x="165600" y="0"/>
-            <a:ext cx="36000" cy="1800000"/>
+            <a:off x="252000" y="676800"/>
+            <a:ext cx="2520000" cy="360000"/>
           </a:xfrm>
           <a:prstGeom prst="rect">
             <a:avLst/>
           </a:prstGeom>
-          <a:solidFill>
-            <a:srgbClr val="525F66"/>
-          </a:solidFill>
-          <a:ln>
-            <a:noFill/>
-          </a:ln>
+          <a:noFill/>
         </p:spPr>
         <p:txBody>
-          <a:bodyPr rtlCol="0" anchor="ctr"/>
-          <a:lstStyle/>
-          <a:p>
-            <a:pPr algn="ctr"/>
-          </a:p>
-        </p:txBody>
-      </p:sp>
-      <p:sp>
-        <p:nvSpPr>
-          <p:cNvPr id="4" name="Freeform 3"/>
-          <p:cNvSpPr/>
+          <a:bodyPr wrap="square" lIns="0" rIns="0" tIns="0" bIns="0" anchor="t">
+            <a:spAutoFit/>
+          </a:bodyPr>
+          <a:lstStyle/>
+          <a:p>
+            <a:pPr algn="l">
+              <a:lnSpc>
+                <a:spcPts val="3190"/>
+              </a:lnSpc>
+            </a:pPr>
+            <a:r>
+              <a:rPr sz="2200" b="1">
+                <a:solidFill>
+                  <a:srgbClr val="12151C"/>
+                </a:solidFill>
+                <a:latin typeface="맑은 고딕"/>
+                <a:ea typeface="맑은 고딕"/>
+              </a:rPr>
+              <a:t>김하늘</a:t>
+            </a:r>
+          </a:p>
+        </p:txBody>
+      </p:sp>
+      <p:sp>
+        <p:nvSpPr>
+          <p:cNvPr id="5" name="텍스트"/>
+          <p:cNvSpPr txBox="1"/>
           <p:nvPr/>
         </p:nvSpPr>
         <p:spPr>
           <a:xfrm>
-            <a:off x="2690496" y="219024"/>
-            <a:ext cx="235008" cy="311040"/>
+            <a:off x="252000" y="1080000"/>
+            <a:ext cx="2520000" cy="171451"/>
           </a:xfrm>
-          <a:custGeom>
-            <a:avLst/>
-            <a:gdLst/>
-            <a:ahLst/>
-            <a:cxnLst/>
-            <a:rect l="l" t="t" r="r" b="b"/>
-            <a:pathLst>
-              <a:path w="235008" h="311040">
-                <a:moveTo>
-                  <a:pt x="0" y="34560"/>
-                </a:moveTo>
-                <a:lnTo>
-                  <a:pt x="117504" y="0"/>
-                </a:lnTo>
-                <a:lnTo>
-                  <a:pt x="235008" y="34560"/>
-                </a:lnTo>
-                <a:lnTo>
-                  <a:pt x="235008" y="165888"/>
-                </a:lnTo>
-                <a:lnTo>
-                  <a:pt x="117504" y="311040"/>
-                </a:lnTo>
-                <a:lnTo>
-                  <a:pt x="0" y="165888"/>
-                </a:lnTo>
-                <a:close/>
-              </a:path>
-            </a:pathLst>
-          </a:custGeom>
-          <a:solidFill>
-            <a:srgbClr val="889EA9"/>
-          </a:solidFill>
-          <a:ln>
-            <a:noFill/>
-          </a:ln>
-        </p:spPr>
-        <p:txBody>
-          <a:bodyPr rtlCol="0" anchor="ctr"/>
-          <a:lstStyle/>
-          <a:p>
-            <a:pPr algn="ctr"/>
-          </a:p>
-        </p:txBody>
-      </p:sp>
-      <p:cxnSp>
-        <p:nvCxnSpPr>
-          <p:cNvPr id="5" name="Connector 4"/>
-          <p:cNvCxnSpPr/>
-          <p:nvPr/>
-        </p:nvCxnSpPr>
-        <p:spPr>
-          <a:xfrm>
-            <a:off x="2759616" y="378000"/>
-            <a:ext cx="38016" cy="41472"/>
-          </a:xfrm>
-          <a:prstGeom prst="line">
+          <a:prstGeom prst="rect">
             <a:avLst/>
           </a:prstGeom>
-          <a:ln w="24192">
-            <a:solidFill>
-              <a:srgbClr val="525F66"/>
-            </a:solidFill>
-          </a:ln>
+          <a:noFill/>
         </p:spPr>
-      </p:cxnSp>
+        <p:txBody>
+          <a:bodyPr wrap="square" lIns="0" rIns="0" tIns="0" bIns="0" anchor="t">
+            <a:spAutoFit/>
+          </a:bodyPr>
+          <a:lstStyle/>
+          <a:p>
+            <a:pPr algn="l">
+              <a:lnSpc>
+                <a:spcPts val="1305"/>
+              </a:lnSpc>
+            </a:pPr>
+            <a:r>
+              <a:rPr sz="900" b="0">
+                <a:solidFill>
+                  <a:srgbClr val="46332D"/>
+                </a:solidFill>
+                <a:latin typeface="맑은 고딕"/>
+                <a:ea typeface="맑은 고딕"/>
+              </a:rPr>
+              <a:t>주무관</a:t>
+            </a:r>
+          </a:p>
+        </p:txBody>
+      </p:sp>
       <p:cxnSp>
         <p:nvCxnSpPr>
           <p:cNvPr id="6" name="Connector 5"/>
@@ -3239,16 +3253,16 @@
           <p:nvPr/>
         </p:nvCxnSpPr>
         <p:spPr>
-          <a:xfrm flipV="1">
-            <a:off x="2797632" y="336528"/>
-            <a:ext cx="65664" cy="82944"/>
+          <a:xfrm>
+            <a:off x="252000" y="1339200"/>
+            <a:ext cx="2736000" cy="0"/>
           </a:xfrm>
           <a:prstGeom prst="line">
             <a:avLst/>
           </a:prstGeom>
-          <a:ln w="24192">
+          <a:ln w="5760">
             <a:solidFill>
-              <a:srgbClr val="525F66"/>
+              <a:srgbClr val="A0674B"/>
             </a:solidFill>
           </a:ln>
         </p:spPr>
@@ -3261,8 +3275,8 @@
         </p:nvSpPr>
         <p:spPr>
           <a:xfrm>
-            <a:off x="396000" y="223200"/>
-            <a:ext cx="2016000" cy="108000"/>
+            <a:off x="252000" y="1411200"/>
+            <a:ext cx="792000" cy="129541"/>
           </a:xfrm>
           <a:prstGeom prst="rect">
             <a:avLst/>
@@ -3277,18 +3291,18 @@
           <a:p>
             <a:pPr algn="l">
               <a:lnSpc>
-                <a:spcPts val="1087"/>
+                <a:spcPts val="986"/>
               </a:lnSpc>
             </a:pPr>
             <a:r>
-              <a:rPr sz="750" b="1" spc="150">
+              <a:rPr sz="680" b="0">
                 <a:solidFill>
-                  <a:srgbClr val="B7BCBF"/>
+                  <a:srgbClr val="12151C"/>
                 </a:solidFill>
                 <a:latin typeface="맑은 고딕"/>
                 <a:ea typeface="맑은 고딕"/>
               </a:rPr>
-              <a:t>기관명 · 부서명</a:t>
+              <a:t>010-1234-5678</a:t>
             </a:r>
           </a:p>
         </p:txBody>
@@ -3301,8 +3315,8 @@
         </p:nvSpPr>
         <p:spPr>
           <a:xfrm>
-            <a:off x="396000" y="540000"/>
-            <a:ext cx="2160000" cy="313692"/>
+            <a:off x="1080000" y="1411200"/>
+            <a:ext cx="900000" cy="129541"/>
           </a:xfrm>
           <a:prstGeom prst="rect">
             <a:avLst/>
@@ -3317,18 +3331,18 @@
           <a:p>
             <a:pPr algn="l">
               <a:lnSpc>
-                <a:spcPts val="2755"/>
+                <a:spcPts val="986"/>
               </a:lnSpc>
             </a:pPr>
             <a:r>
-              <a:rPr sz="1900" b="1" spc="50">
+              <a:rPr sz="680" b="0">
                 <a:solidFill>
-                  <a:srgbClr val="FFFFFF"/>
+                  <a:srgbClr val="12151C"/>
                 </a:solidFill>
-                <a:latin typeface="바탕"/>
-                <a:ea typeface="바탕"/>
+                <a:latin typeface="맑은 고딕"/>
+                <a:ea typeface="맑은 고딕"/>
               </a:rPr>
-              <a:t>김하늘</a:t>
+              <a:t>name@example.com</a:t>
             </a:r>
           </a:p>
         </p:txBody>
@@ -3341,8 +3355,8 @@
         </p:nvSpPr>
         <p:spPr>
           <a:xfrm>
-            <a:off x="396000" y="835200"/>
-            <a:ext cx="2160000" cy="129600"/>
+            <a:off x="2052000" y="1411200"/>
+            <a:ext cx="972000" cy="129541"/>
           </a:xfrm>
           <a:prstGeom prst="rect">
             <a:avLst/>
@@ -3357,61 +3371,32 @@
           <a:p>
             <a:pPr algn="l">
               <a:lnSpc>
-                <a:spcPts val="1232"/>
+                <a:spcPts val="986"/>
               </a:lnSpc>
             </a:pPr>
             <a:r>
-              <a:rPr sz="850" b="1">
+              <a:rPr sz="680" b="0">
                 <a:solidFill>
-                  <a:srgbClr val="9AADB6"/>
+                  <a:srgbClr val="12151C"/>
                 </a:solidFill>
                 <a:latin typeface="맑은 고딕"/>
                 <a:ea typeface="맑은 고딕"/>
               </a:rPr>
-              <a:t>주무관</a:t>
-            </a:r>
-          </a:p>
-        </p:txBody>
-      </p:sp>
-      <p:sp>
-        <p:nvSpPr>
-          <p:cNvPr id="10" name="Rectangle 9"/>
-          <p:cNvSpPr/>
+              <a:t>주소를 입력해 주세요</a:t>
+            </a:r>
+          </a:p>
+        </p:txBody>
+      </p:sp>
+      <p:sp>
+        <p:nvSpPr>
+          <p:cNvPr id="10" name="텍스트"/>
+          <p:cNvSpPr txBox="1"/>
           <p:nvPr/>
         </p:nvSpPr>
         <p:spPr>
           <a:xfrm>
-            <a:off x="396000" y="1051200"/>
-            <a:ext cx="230400" cy="14400"/>
-          </a:xfrm>
-          <a:prstGeom prst="rect">
-            <a:avLst/>
-          </a:prstGeom>
-          <a:solidFill>
-            <a:srgbClr val="889EA9"/>
-          </a:solidFill>
-          <a:ln>
-            <a:noFill/>
-          </a:ln>
-        </p:spPr>
-        <p:txBody>
-          <a:bodyPr rtlCol="0" anchor="ctr"/>
-          <a:lstStyle/>
-          <a:p>
-            <a:pPr algn="ctr"/>
-          </a:p>
-        </p:txBody>
-      </p:sp>
-      <p:sp>
-        <p:nvSpPr>
-          <p:cNvPr id="11" name="텍스트"/>
-          <p:cNvSpPr txBox="1"/>
-          <p:nvPr/>
-        </p:nvSpPr>
-        <p:spPr>
-          <a:xfrm>
-            <a:off x="396000" y="1188000"/>
-            <a:ext cx="122400" cy="168911"/>
+            <a:off x="252000" y="1526400"/>
+            <a:ext cx="216000" cy="95251"/>
           </a:xfrm>
           <a:prstGeom prst="rect">
             <a:avLst/>
@@ -3426,32 +3411,32 @@
           <a:p>
             <a:pPr algn="l">
               <a:lnSpc>
-                <a:spcPts val="1015"/>
+                <a:spcPts val="725"/>
               </a:lnSpc>
             </a:pPr>
             <a:r>
-              <a:rPr sz="700" b="1">
+              <a:rPr sz="500" b="1" spc="120">
                 <a:solidFill>
-                  <a:srgbClr val="9AADB6"/>
+                  <a:srgbClr val="46332D"/>
                 </a:solidFill>
                 <a:latin typeface="맑은 고딕"/>
                 <a:ea typeface="맑은 고딕"/>
               </a:rPr>
-              <a:t>T</a:t>
-            </a:r>
-          </a:p>
-        </p:txBody>
-      </p:sp>
-      <p:sp>
-        <p:nvSpPr>
-          <p:cNvPr id="12" name="텍스트"/>
+              <a:t>TEL</a:t>
+            </a:r>
+          </a:p>
+        </p:txBody>
+      </p:sp>
+      <p:sp>
+        <p:nvSpPr>
+          <p:cNvPr id="11" name="텍스트"/>
           <p:cNvSpPr txBox="1"/>
           <p:nvPr/>
         </p:nvSpPr>
         <p:spPr>
           <a:xfrm>
-            <a:off x="540000" y="1188000"/>
-            <a:ext cx="1872000" cy="168911"/>
+            <a:off x="1080000" y="1526400"/>
+            <a:ext cx="216000" cy="95251"/>
           </a:xfrm>
           <a:prstGeom prst="rect">
             <a:avLst/>
@@ -3466,32 +3451,32 @@
           <a:p>
             <a:pPr algn="l">
               <a:lnSpc>
-                <a:spcPts val="1015"/>
+                <a:spcPts val="725"/>
               </a:lnSpc>
             </a:pPr>
             <a:r>
-              <a:rPr sz="700" b="0">
+              <a:rPr sz="500" b="1" spc="120">
                 <a:solidFill>
-                  <a:srgbClr val="FFFFFF"/>
+                  <a:srgbClr val="46332D"/>
                 </a:solidFill>
                 <a:latin typeface="맑은 고딕"/>
                 <a:ea typeface="맑은 고딕"/>
               </a:rPr>
-              <a:t>010-1234-5678</a:t>
-            </a:r>
-          </a:p>
-        </p:txBody>
-      </p:sp>
-      <p:sp>
-        <p:nvSpPr>
-          <p:cNvPr id="13" name="텍스트"/>
+              <a:t>MAIL</a:t>
+            </a:r>
+          </a:p>
+        </p:txBody>
+      </p:sp>
+      <p:sp>
+        <p:nvSpPr>
+          <p:cNvPr id="12" name="텍스트"/>
           <p:cNvSpPr txBox="1"/>
           <p:nvPr/>
         </p:nvSpPr>
         <p:spPr>
           <a:xfrm>
-            <a:off x="396000" y="1356911"/>
-            <a:ext cx="122400" cy="168911"/>
+            <a:off x="2052000" y="1526400"/>
+            <a:ext cx="216000" cy="95251"/>
           </a:xfrm>
           <a:prstGeom prst="rect">
             <a:avLst/>
@@ -3506,138 +3491,18 @@
           <a:p>
             <a:pPr algn="l">
               <a:lnSpc>
-                <a:spcPts val="1015"/>
+                <a:spcPts val="725"/>
               </a:lnSpc>
             </a:pPr>
             <a:r>
-              <a:rPr sz="700" b="1">
+              <a:rPr sz="500" b="1" spc="120">
                 <a:solidFill>
-                  <a:srgbClr val="9AADB6"/>
+                  <a:srgbClr val="46332D"/>
                 </a:solidFill>
                 <a:latin typeface="맑은 고딕"/>
                 <a:ea typeface="맑은 고딕"/>
               </a:rPr>
-              <a:t>E</a:t>
-            </a:r>
-          </a:p>
-        </p:txBody>
-      </p:sp>
-      <p:sp>
-        <p:nvSpPr>
-          <p:cNvPr id="14" name="텍스트"/>
-          <p:cNvSpPr txBox="1"/>
-          <p:nvPr/>
-        </p:nvSpPr>
-        <p:spPr>
-          <a:xfrm>
-            <a:off x="540000" y="1356911"/>
-            <a:ext cx="1872000" cy="168911"/>
-          </a:xfrm>
-          <a:prstGeom prst="rect">
-            <a:avLst/>
-          </a:prstGeom>
-          <a:noFill/>
-        </p:spPr>
-        <p:txBody>
-          <a:bodyPr wrap="square" lIns="0" rIns="0" tIns="0" bIns="0" anchor="t">
-            <a:spAutoFit/>
-          </a:bodyPr>
-          <a:lstStyle/>
-          <a:p>
-            <a:pPr algn="l">
-              <a:lnSpc>
-                <a:spcPts val="1015"/>
-              </a:lnSpc>
-            </a:pPr>
-            <a:r>
-              <a:rPr sz="700" b="0">
-                <a:solidFill>
-                  <a:srgbClr val="FFFFFF"/>
-                </a:solidFill>
-                <a:latin typeface="맑은 고딕"/>
-                <a:ea typeface="맑은 고딕"/>
-              </a:rPr>
-              <a:t>name@example.com</a:t>
-            </a:r>
-          </a:p>
-        </p:txBody>
-      </p:sp>
-      <p:sp>
-        <p:nvSpPr>
-          <p:cNvPr id="15" name="텍스트"/>
-          <p:cNvSpPr txBox="1"/>
-          <p:nvPr/>
-        </p:nvSpPr>
-        <p:spPr>
-          <a:xfrm>
-            <a:off x="396000" y="1525822"/>
-            <a:ext cx="122400" cy="168911"/>
-          </a:xfrm>
-          <a:prstGeom prst="rect">
-            <a:avLst/>
-          </a:prstGeom>
-          <a:noFill/>
-        </p:spPr>
-        <p:txBody>
-          <a:bodyPr wrap="square" lIns="0" rIns="0" tIns="0" bIns="0" anchor="t">
-            <a:spAutoFit/>
-          </a:bodyPr>
-          <a:lstStyle/>
-          <a:p>
-            <a:pPr algn="l">
-              <a:lnSpc>
-                <a:spcPts val="1015"/>
-              </a:lnSpc>
-            </a:pPr>
-            <a:r>
-              <a:rPr sz="700" b="1">
-                <a:solidFill>
-                  <a:srgbClr val="9AADB6"/>
-                </a:solidFill>
-                <a:latin typeface="맑은 고딕"/>
-                <a:ea typeface="맑은 고딕"/>
-              </a:rPr>
-              <a:t>A</a:t>
-            </a:r>
-          </a:p>
-        </p:txBody>
-      </p:sp>
-      <p:sp>
-        <p:nvSpPr>
-          <p:cNvPr id="16" name="텍스트"/>
-          <p:cNvSpPr txBox="1"/>
-          <p:nvPr/>
-        </p:nvSpPr>
-        <p:spPr>
-          <a:xfrm>
-            <a:off x="540000" y="1525822"/>
-            <a:ext cx="1872000" cy="168911"/>
-          </a:xfrm>
-          <a:prstGeom prst="rect">
-            <a:avLst/>
-          </a:prstGeom>
-          <a:noFill/>
-        </p:spPr>
-        <p:txBody>
-          <a:bodyPr wrap="square" lIns="0" rIns="0" tIns="0" bIns="0" anchor="t">
-            <a:spAutoFit/>
-          </a:bodyPr>
-          <a:lstStyle/>
-          <a:p>
-            <a:pPr algn="l">
-              <a:lnSpc>
-                <a:spcPts val="1015"/>
-              </a:lnSpc>
-            </a:pPr>
-            <a:r>
-              <a:rPr sz="700" b="0">
-                <a:solidFill>
-                  <a:srgbClr val="FFFFFF"/>
-                </a:solidFill>
-                <a:latin typeface="맑은 고딕"/>
-                <a:ea typeface="맑은 고딕"/>
-              </a:rPr>
-              <a:t>주소를 입력해 주세요</a:t>
+              <a:t>ADDR</a:t>
             </a:r>
           </a:p>
         </p:txBody>
@@ -3656,7 +3521,7 @@
     <p:bg>
       <p:bgPr>
         <a:solidFill>
-          <a:srgbClr val="FFFFFF"/>
+          <a:srgbClr val="FFF5F0"/>
         </a:solidFill>
         <a:effectLst/>
       </p:bgPr>
@@ -3670,23 +3535,23 @@
       <p:grpSpPr/>
       <p:sp>
         <p:nvSpPr>
-          <p:cNvPr id="2" name="Rectangle 1"/>
+          <p:cNvPr id="2" name="Oval 1"/>
           <p:cNvSpPr/>
           <p:nvPr/>
         </p:nvSpPr>
         <p:spPr>
           <a:xfrm>
-            <a:off x="108000" y="108000"/>
-            <a:ext cx="3024000" cy="1584000"/>
+            <a:off x="1591200" y="511200"/>
+            <a:ext cx="57600" cy="57600"/>
           </a:xfrm>
-          <a:prstGeom prst="rect">
+          <a:prstGeom prst="ellipse">
             <a:avLst/>
           </a:prstGeom>
-          <a:noFill/>
-          <a:ln w="10800">
-            <a:solidFill>
-              <a:srgbClr val="5A7887"/>
-            </a:solidFill>
+          <a:solidFill>
+            <a:srgbClr val="FF9E6B"/>
+          </a:solidFill>
+          <a:ln>
+            <a:noFill/>
           </a:ln>
         </p:spPr>
         <p:txBody>
@@ -3705,8 +3570,8 @@
         </p:nvSpPr>
         <p:spPr>
           <a:xfrm>
-            <a:off x="396000" y="504000"/>
-            <a:ext cx="2448000" cy="432000"/>
+            <a:off x="396000" y="684000"/>
+            <a:ext cx="2448000" cy="504000"/>
           </a:xfrm>
           <a:prstGeom prst="rect">
             <a:avLst/>
@@ -3714,7 +3579,7 @@
           <a:noFill/>
         </p:spPr>
         <p:txBody>
-          <a:bodyPr wrap="square" lIns="0" rIns="0" tIns="0" bIns="0" anchor="ctr">
+          <a:bodyPr wrap="square" lIns="0" rIns="0" tIns="0" bIns="0" anchor="t">
             <a:spAutoFit/>
           </a:bodyPr>
           <a:lstStyle/>
@@ -3727,7 +3592,7 @@
             <a:r>
               <a:rPr sz="1200" b="1">
                 <a:solidFill>
-                  <a:srgbClr val="314149"/>
+                  <a:srgbClr val="12151C"/>
                 </a:solidFill>
                 <a:latin typeface="맑은 고딕"/>
                 <a:ea typeface="맑은 고딕"/>
@@ -3737,66 +3602,16 @@
           </a:p>
         </p:txBody>
       </p:sp>
-      <p:cxnSp>
-        <p:nvCxnSpPr>
-          <p:cNvPr id="4" name="Connector 3"/>
-          <p:cNvCxnSpPr/>
+      <p:sp>
+        <p:nvSpPr>
+          <p:cNvPr id="4" name="텍스트"/>
+          <p:cNvSpPr txBox="1"/>
           <p:nvPr/>
-        </p:nvCxnSpPr>
+        </p:nvSpPr>
         <p:spPr>
           <a:xfrm>
-            <a:off x="1260000" y="1080000"/>
-            <a:ext cx="684000" cy="0"/>
-          </a:xfrm>
-          <a:prstGeom prst="line">
-            <a:avLst/>
-          </a:prstGeom>
-          <a:ln w="7200">
-            <a:solidFill>
-              <a:srgbClr val="5A7887"/>
-            </a:solidFill>
-          </a:ln>
-        </p:spPr>
-      </p:cxnSp>
-      <p:sp>
-        <p:nvSpPr>
-          <p:cNvPr id="5" name="Oval 4"/>
-          <p:cNvSpPr/>
-          <p:nvPr/>
-        </p:nvSpPr>
-        <p:spPr>
-          <a:xfrm>
-            <a:off x="1594800" y="1054800"/>
-            <a:ext cx="50400" cy="50400"/>
-          </a:xfrm>
-          <a:prstGeom prst="ellipse">
-            <a:avLst/>
-          </a:prstGeom>
-          <a:solidFill>
-            <a:srgbClr val="5A7887"/>
-          </a:solidFill>
-          <a:ln>
-            <a:noFill/>
-          </a:ln>
-        </p:spPr>
-        <p:txBody>
-          <a:bodyPr rtlCol="0" anchor="ctr"/>
-          <a:lstStyle/>
-          <a:p>
-            <a:pPr algn="ctr"/>
-          </a:p>
-        </p:txBody>
-      </p:sp>
-      <p:sp>
-        <p:nvSpPr>
-          <p:cNvPr id="6" name="텍스트"/>
-          <p:cNvSpPr txBox="1"/>
-          <p:nvPr/>
-        </p:nvSpPr>
-        <p:spPr>
-          <a:xfrm>
-            <a:off x="360000" y="1224000"/>
-            <a:ext cx="2520000" cy="108000"/>
+            <a:off x="360000" y="1339200"/>
+            <a:ext cx="2520000" cy="123826"/>
           </a:xfrm>
           <a:prstGeom prst="rect">
             <a:avLst/>
@@ -3811,13 +3626,13 @@
           <a:p>
             <a:pPr algn="ctr">
               <a:lnSpc>
-                <a:spcPts val="1087"/>
+                <a:spcPts val="942"/>
               </a:lnSpc>
             </a:pPr>
             <a:r>
-              <a:rPr sz="750" b="1" spc="300">
+              <a:rPr sz="650" b="1" spc="300">
                 <a:solidFill>
-                  <a:srgbClr val="6D777B"/>
+                  <a:srgbClr val="6C493A"/>
                 </a:solidFill>
                 <a:latin typeface="맑은 고딕"/>
                 <a:ea typeface="맑은 고딕"/>
@@ -3827,104 +3642,6 @@
           </a:p>
         </p:txBody>
       </p:sp>
-      <p:sp>
-        <p:nvSpPr>
-          <p:cNvPr id="7" name="Freeform 6"/>
-          <p:cNvSpPr/>
-          <p:nvPr/>
-        </p:nvSpPr>
-        <p:spPr>
-          <a:xfrm>
-            <a:off x="1558800" y="241200"/>
-            <a:ext cx="122400" cy="162000"/>
-          </a:xfrm>
-          <a:custGeom>
-            <a:avLst/>
-            <a:gdLst/>
-            <a:ahLst/>
-            <a:cxnLst/>
-            <a:rect l="l" t="t" r="r" b="b"/>
-            <a:pathLst>
-              <a:path w="122400" h="162000">
-                <a:moveTo>
-                  <a:pt x="0" y="18000"/>
-                </a:moveTo>
-                <a:lnTo>
-                  <a:pt x="61200" y="0"/>
-                </a:lnTo>
-                <a:lnTo>
-                  <a:pt x="122400" y="18000"/>
-                </a:lnTo>
-                <a:lnTo>
-                  <a:pt x="122400" y="86400"/>
-                </a:lnTo>
-                <a:lnTo>
-                  <a:pt x="61200" y="162000"/>
-                </a:lnTo>
-                <a:lnTo>
-                  <a:pt x="0" y="86400"/>
-                </a:lnTo>
-                <a:close/>
-              </a:path>
-            </a:pathLst>
-          </a:custGeom>
-          <a:solidFill>
-            <a:srgbClr val="5A7887"/>
-          </a:solidFill>
-          <a:ln>
-            <a:noFill/>
-          </a:ln>
-        </p:spPr>
-        <p:txBody>
-          <a:bodyPr rtlCol="0" anchor="ctr"/>
-          <a:lstStyle/>
-          <a:p>
-            <a:pPr algn="ctr"/>
-          </a:p>
-        </p:txBody>
-      </p:sp>
-      <p:cxnSp>
-        <p:nvCxnSpPr>
-          <p:cNvPr id="8" name="Connector 7"/>
-          <p:cNvCxnSpPr/>
-          <p:nvPr/>
-        </p:nvCxnSpPr>
-        <p:spPr>
-          <a:xfrm>
-            <a:off x="1594800" y="324000"/>
-            <a:ext cx="19800" cy="21600"/>
-          </a:xfrm>
-          <a:prstGeom prst="line">
-            <a:avLst/>
-          </a:prstGeom>
-          <a:ln w="12600">
-            <a:solidFill>
-              <a:srgbClr val="D9E3E8"/>
-            </a:solidFill>
-          </a:ln>
-        </p:spPr>
-      </p:cxnSp>
-      <p:cxnSp>
-        <p:nvCxnSpPr>
-          <p:cNvPr id="9" name="Connector 8"/>
-          <p:cNvCxnSpPr/>
-          <p:nvPr/>
-        </p:nvCxnSpPr>
-        <p:spPr>
-          <a:xfrm flipV="1">
-            <a:off x="1614600" y="302400"/>
-            <a:ext cx="34200" cy="43200"/>
-          </a:xfrm>
-          <a:prstGeom prst="line">
-            <a:avLst/>
-          </a:prstGeom>
-          <a:ln w="12600">
-            <a:solidFill>
-              <a:srgbClr val="D9E3E8"/>
-            </a:solidFill>
-          </a:ln>
-        </p:spPr>
-      </p:cxnSp>
     </p:spTree>
   </p:cSld>
   <p:clrMapOvr>

--- a/public/fun/cards/public/public-01.pptx
+++ b/public/fun/cards/public/public-01.pptx
@@ -3099,56 +3099,45 @@
       <p:grpSpPr/>
       <p:sp>
         <p:nvSpPr>
-          <p:cNvPr id="2" name="텍스트"/>
-          <p:cNvSpPr txBox="1"/>
+          <p:cNvPr id="2" name="Rectangle 1"/>
+          <p:cNvSpPr/>
           <p:nvPr/>
         </p:nvSpPr>
         <p:spPr>
           <a:xfrm>
-            <a:off x="252000" y="223200"/>
-            <a:ext cx="2016000" cy="133351"/>
+            <a:off x="93600" y="93600"/>
+            <a:ext cx="3052800" cy="1612800"/>
           </a:xfrm>
           <a:prstGeom prst="rect">
             <a:avLst/>
           </a:prstGeom>
           <a:noFill/>
-        </p:spPr>
-        <p:txBody>
-          <a:bodyPr wrap="square" lIns="0" rIns="0" tIns="0" bIns="0" anchor="t">
-            <a:spAutoFit/>
-          </a:bodyPr>
-          <a:lstStyle/>
-          <a:p>
-            <a:pPr algn="l">
-              <a:lnSpc>
-                <a:spcPts val="1015"/>
-              </a:lnSpc>
-            </a:pPr>
-            <a:r>
-              <a:rPr sz="700" b="1" spc="200">
-                <a:solidFill>
-                  <a:srgbClr val="46332D"/>
-                </a:solidFill>
-                <a:latin typeface="맑은 고딕"/>
-                <a:ea typeface="맑은 고딕"/>
-              </a:rPr>
-              <a:t>기관명 · 부서명</a:t>
-            </a:r>
-          </a:p>
-        </p:txBody>
-      </p:sp>
-      <p:sp>
-        <p:nvSpPr>
-          <p:cNvPr id="3" name="Oval 2"/>
+          <a:ln w="3600">
+            <a:solidFill>
+              <a:srgbClr val="A0674B"/>
+            </a:solidFill>
+          </a:ln>
+        </p:spPr>
+        <p:txBody>
+          <a:bodyPr rtlCol="0" anchor="ctr"/>
+          <a:lstStyle/>
+          <a:p>
+            <a:pPr algn="ctr"/>
+          </a:p>
+        </p:txBody>
+      </p:sp>
+      <p:sp>
+        <p:nvSpPr>
+          <p:cNvPr id="3" name="Rectangle 2"/>
           <p:cNvSpPr/>
           <p:nvPr/>
         </p:nvSpPr>
         <p:spPr>
           <a:xfrm>
-            <a:off x="2955600" y="241200"/>
-            <a:ext cx="64800" cy="64800"/>
-          </a:xfrm>
-          <a:prstGeom prst="ellipse">
+            <a:off x="252000" y="252000"/>
+            <a:ext cx="79200" cy="79200"/>
+          </a:xfrm>
+          <a:prstGeom prst="rect">
             <a:avLst/>
           </a:prstGeom>
           <a:solidFill>
@@ -3174,8 +3163,8 @@
         </p:nvSpPr>
         <p:spPr>
           <a:xfrm>
-            <a:off x="252000" y="676800"/>
-            <a:ext cx="2520000" cy="360000"/>
+            <a:off x="396000" y="259200"/>
+            <a:ext cx="1512000" cy="123826"/>
           </a:xfrm>
           <a:prstGeom prst="rect">
             <a:avLst/>
@@ -3190,11 +3179,72 @@
           <a:p>
             <a:pPr algn="l">
               <a:lnSpc>
-                <a:spcPts val="3190"/>
+                <a:spcPts val="942"/>
               </a:lnSpc>
             </a:pPr>
             <a:r>
-              <a:rPr sz="2200" b="1">
+              <a:rPr sz="650" b="1" spc="220">
+                <a:solidFill>
+                  <a:srgbClr val="46332D"/>
+                </a:solidFill>
+                <a:latin typeface="맑은 고딕"/>
+                <a:ea typeface="맑은 고딕"/>
+              </a:rPr>
+              <a:t>기관명 · 부서명</a:t>
+            </a:r>
+          </a:p>
+        </p:txBody>
+      </p:sp>
+      <p:cxnSp>
+        <p:nvCxnSpPr>
+          <p:cNvPr id="5" name="Connector 4"/>
+          <p:cNvCxnSpPr/>
+          <p:nvPr/>
+        </p:nvCxnSpPr>
+        <p:spPr>
+          <a:xfrm>
+            <a:off x="252000" y="446400"/>
+            <a:ext cx="2736000" cy="0"/>
+          </a:xfrm>
+          <a:prstGeom prst="line">
+            <a:avLst/>
+          </a:prstGeom>
+          <a:ln w="3600">
+            <a:solidFill>
+              <a:srgbClr val="A0674B"/>
+            </a:solidFill>
+          </a:ln>
+        </p:spPr>
+      </p:cxnSp>
+      <p:sp>
+        <p:nvSpPr>
+          <p:cNvPr id="6" name="텍스트"/>
+          <p:cNvSpPr txBox="1"/>
+          <p:nvPr/>
+        </p:nvSpPr>
+        <p:spPr>
+          <a:xfrm>
+            <a:off x="252000" y="964800"/>
+            <a:ext cx="1800000" cy="237600"/>
+          </a:xfrm>
+          <a:prstGeom prst="rect">
+            <a:avLst/>
+          </a:prstGeom>
+          <a:noFill/>
+        </p:spPr>
+        <p:txBody>
+          <a:bodyPr wrap="square" lIns="0" rIns="0" tIns="0" bIns="0" anchor="t">
+            <a:spAutoFit/>
+          </a:bodyPr>
+          <a:lstStyle/>
+          <a:p>
+            <a:pPr algn="l">
+              <a:lnSpc>
+                <a:spcPts val="1957"/>
+              </a:lnSpc>
+            </a:pPr>
+            <a:r>
+              <a:rPr sz="1350" b="1" spc="120">
                 <a:solidFill>
                   <a:srgbClr val="12151C"/>
                 </a:solidFill>
@@ -3208,14 +3258,14 @@
       </p:sp>
       <p:sp>
         <p:nvSpPr>
-          <p:cNvPr id="5" name="텍스트"/>
+          <p:cNvPr id="7" name="텍스트"/>
           <p:cNvSpPr txBox="1"/>
           <p:nvPr/>
         </p:nvSpPr>
         <p:spPr>
           <a:xfrm>
-            <a:off x="252000" y="1080000"/>
-            <a:ext cx="2520000" cy="171451"/>
+            <a:off x="252000" y="1216800"/>
+            <a:ext cx="1800000" cy="133351"/>
           </a:xfrm>
           <a:prstGeom prst="rect">
             <a:avLst/>
@@ -3230,11 +3280,11 @@
           <a:p>
             <a:pPr algn="l">
               <a:lnSpc>
-                <a:spcPts val="1305"/>
+                <a:spcPts val="1015"/>
               </a:lnSpc>
             </a:pPr>
             <a:r>
-              <a:rPr sz="900" b="0">
+              <a:rPr sz="700" b="0" spc="60">
                 <a:solidFill>
                   <a:srgbClr val="46332D"/>
                 </a:solidFill>
@@ -3248,19 +3298,19 @@
       </p:sp>
       <p:cxnSp>
         <p:nvCxnSpPr>
-          <p:cNvPr id="6" name="Connector 5"/>
+          <p:cNvPr id="8" name="Connector 7"/>
           <p:cNvCxnSpPr/>
           <p:nvPr/>
         </p:nvCxnSpPr>
         <p:spPr>
           <a:xfrm>
-            <a:off x="252000" y="1339200"/>
-            <a:ext cx="2736000" cy="0"/>
+            <a:off x="1872000" y="943200"/>
+            <a:ext cx="0" cy="604800"/>
           </a:xfrm>
           <a:prstGeom prst="line">
             <a:avLst/>
           </a:prstGeom>
-          <a:ln w="5760">
+          <a:ln w="3600">
             <a:solidFill>
               <a:srgbClr val="A0674B"/>
             </a:solidFill>
@@ -3269,14 +3319,14 @@
       </p:cxnSp>
       <p:sp>
         <p:nvSpPr>
-          <p:cNvPr id="7" name="텍스트"/>
+          <p:cNvPr id="9" name="텍스트"/>
           <p:cNvSpPr txBox="1"/>
           <p:nvPr/>
         </p:nvSpPr>
         <p:spPr>
           <a:xfrm>
-            <a:off x="252000" y="1411200"/>
-            <a:ext cx="792000" cy="129541"/>
+            <a:off x="2016000" y="1033200"/>
+            <a:ext cx="302400" cy="91441"/>
           </a:xfrm>
           <a:prstGeom prst="rect">
             <a:avLst/>
@@ -3291,11 +3341,51 @@
           <a:p>
             <a:pPr algn="l">
               <a:lnSpc>
-                <a:spcPts val="986"/>
+                <a:spcPts val="696"/>
               </a:lnSpc>
             </a:pPr>
             <a:r>
-              <a:rPr sz="680" b="0">
+              <a:rPr sz="480" b="1" spc="140">
+                <a:solidFill>
+                  <a:srgbClr val="46332D"/>
+                </a:solidFill>
+                <a:latin typeface="맑은 고딕"/>
+                <a:ea typeface="맑은 고딕"/>
+              </a:rPr>
+              <a:t>TEL</a:t>
+            </a:r>
+          </a:p>
+        </p:txBody>
+      </p:sp>
+      <p:sp>
+        <p:nvSpPr>
+          <p:cNvPr id="10" name="텍스트"/>
+          <p:cNvSpPr txBox="1"/>
+          <p:nvPr/>
+        </p:nvSpPr>
+        <p:spPr>
+          <a:xfrm>
+            <a:off x="2318400" y="1022400"/>
+            <a:ext cx="972000" cy="123826"/>
+          </a:xfrm>
+          <a:prstGeom prst="rect">
+            <a:avLst/>
+          </a:prstGeom>
+          <a:noFill/>
+        </p:spPr>
+        <p:txBody>
+          <a:bodyPr wrap="square" lIns="0" rIns="0" tIns="0" bIns="0" anchor="t">
+            <a:spAutoFit/>
+          </a:bodyPr>
+          <a:lstStyle/>
+          <a:p>
+            <a:pPr algn="l">
+              <a:lnSpc>
+                <a:spcPts val="942"/>
+              </a:lnSpc>
+            </a:pPr>
+            <a:r>
+              <a:rPr sz="650" b="0">
                 <a:solidFill>
                   <a:srgbClr val="12151C"/>
                 </a:solidFill>
@@ -3309,14 +3399,14 @@
       </p:sp>
       <p:sp>
         <p:nvSpPr>
-          <p:cNvPr id="8" name="텍스트"/>
+          <p:cNvPr id="11" name="텍스트"/>
           <p:cNvSpPr txBox="1"/>
           <p:nvPr/>
         </p:nvSpPr>
         <p:spPr>
           <a:xfrm>
-            <a:off x="1080000" y="1411200"/>
-            <a:ext cx="900000" cy="129541"/>
+            <a:off x="2016000" y="1177200"/>
+            <a:ext cx="302400" cy="91441"/>
           </a:xfrm>
           <a:prstGeom prst="rect">
             <a:avLst/>
@@ -3331,11 +3421,51 @@
           <a:p>
             <a:pPr algn="l">
               <a:lnSpc>
-                <a:spcPts val="986"/>
+                <a:spcPts val="696"/>
               </a:lnSpc>
             </a:pPr>
             <a:r>
-              <a:rPr sz="680" b="0">
+              <a:rPr sz="480" b="1" spc="140">
+                <a:solidFill>
+                  <a:srgbClr val="46332D"/>
+                </a:solidFill>
+                <a:latin typeface="맑은 고딕"/>
+                <a:ea typeface="맑은 고딕"/>
+              </a:rPr>
+              <a:t>MAIL</a:t>
+            </a:r>
+          </a:p>
+        </p:txBody>
+      </p:sp>
+      <p:sp>
+        <p:nvSpPr>
+          <p:cNvPr id="12" name="텍스트"/>
+          <p:cNvSpPr txBox="1"/>
+          <p:nvPr/>
+        </p:nvSpPr>
+        <p:spPr>
+          <a:xfrm>
+            <a:off x="2318400" y="1166400"/>
+            <a:ext cx="972000" cy="123826"/>
+          </a:xfrm>
+          <a:prstGeom prst="rect">
+            <a:avLst/>
+          </a:prstGeom>
+          <a:noFill/>
+        </p:spPr>
+        <p:txBody>
+          <a:bodyPr wrap="square" lIns="0" rIns="0" tIns="0" bIns="0" anchor="t">
+            <a:spAutoFit/>
+          </a:bodyPr>
+          <a:lstStyle/>
+          <a:p>
+            <a:pPr algn="l">
+              <a:lnSpc>
+                <a:spcPts val="942"/>
+              </a:lnSpc>
+            </a:pPr>
+            <a:r>
+              <a:rPr sz="650" b="0">
                 <a:solidFill>
                   <a:srgbClr val="12151C"/>
                 </a:solidFill>
@@ -3349,14 +3479,14 @@
       </p:sp>
       <p:sp>
         <p:nvSpPr>
-          <p:cNvPr id="9" name="텍스트"/>
+          <p:cNvPr id="13" name="텍스트"/>
           <p:cNvSpPr txBox="1"/>
           <p:nvPr/>
         </p:nvSpPr>
         <p:spPr>
           <a:xfrm>
-            <a:off x="2052000" y="1411200"/>
-            <a:ext cx="972000" cy="129541"/>
+            <a:off x="2016000" y="1321200"/>
+            <a:ext cx="302400" cy="91441"/>
           </a:xfrm>
           <a:prstGeom prst="rect">
             <a:avLst/>
@@ -3371,11 +3501,51 @@
           <a:p>
             <a:pPr algn="l">
               <a:lnSpc>
-                <a:spcPts val="986"/>
+                <a:spcPts val="696"/>
               </a:lnSpc>
             </a:pPr>
             <a:r>
-              <a:rPr sz="680" b="0">
+              <a:rPr sz="480" b="1" spc="140">
+                <a:solidFill>
+                  <a:srgbClr val="46332D"/>
+                </a:solidFill>
+                <a:latin typeface="맑은 고딕"/>
+                <a:ea typeface="맑은 고딕"/>
+              </a:rPr>
+              <a:t>ADDR</a:t>
+            </a:r>
+          </a:p>
+        </p:txBody>
+      </p:sp>
+      <p:sp>
+        <p:nvSpPr>
+          <p:cNvPr id="14" name="텍스트"/>
+          <p:cNvSpPr txBox="1"/>
+          <p:nvPr/>
+        </p:nvSpPr>
+        <p:spPr>
+          <a:xfrm>
+            <a:off x="2318400" y="1310400"/>
+            <a:ext cx="972000" cy="123826"/>
+          </a:xfrm>
+          <a:prstGeom prst="rect">
+            <a:avLst/>
+          </a:prstGeom>
+          <a:noFill/>
+        </p:spPr>
+        <p:txBody>
+          <a:bodyPr wrap="square" lIns="0" rIns="0" tIns="0" bIns="0" anchor="t">
+            <a:spAutoFit/>
+          </a:bodyPr>
+          <a:lstStyle/>
+          <a:p>
+            <a:pPr algn="l">
+              <a:lnSpc>
+                <a:spcPts val="942"/>
+              </a:lnSpc>
+            </a:pPr>
+            <a:r>
+              <a:rPr sz="650" b="0">
                 <a:solidFill>
                   <a:srgbClr val="12151C"/>
                 </a:solidFill>
@@ -3383,126 +3553,6 @@
                 <a:ea typeface="맑은 고딕"/>
               </a:rPr>
               <a:t>주소를 입력해 주세요</a:t>
-            </a:r>
-          </a:p>
-        </p:txBody>
-      </p:sp>
-      <p:sp>
-        <p:nvSpPr>
-          <p:cNvPr id="10" name="텍스트"/>
-          <p:cNvSpPr txBox="1"/>
-          <p:nvPr/>
-        </p:nvSpPr>
-        <p:spPr>
-          <a:xfrm>
-            <a:off x="252000" y="1526400"/>
-            <a:ext cx="216000" cy="95251"/>
-          </a:xfrm>
-          <a:prstGeom prst="rect">
-            <a:avLst/>
-          </a:prstGeom>
-          <a:noFill/>
-        </p:spPr>
-        <p:txBody>
-          <a:bodyPr wrap="square" lIns="0" rIns="0" tIns="0" bIns="0" anchor="t">
-            <a:spAutoFit/>
-          </a:bodyPr>
-          <a:lstStyle/>
-          <a:p>
-            <a:pPr algn="l">
-              <a:lnSpc>
-                <a:spcPts val="725"/>
-              </a:lnSpc>
-            </a:pPr>
-            <a:r>
-              <a:rPr sz="500" b="1" spc="120">
-                <a:solidFill>
-                  <a:srgbClr val="46332D"/>
-                </a:solidFill>
-                <a:latin typeface="맑은 고딕"/>
-                <a:ea typeface="맑은 고딕"/>
-              </a:rPr>
-              <a:t>TEL</a:t>
-            </a:r>
-          </a:p>
-        </p:txBody>
-      </p:sp>
-      <p:sp>
-        <p:nvSpPr>
-          <p:cNvPr id="11" name="텍스트"/>
-          <p:cNvSpPr txBox="1"/>
-          <p:nvPr/>
-        </p:nvSpPr>
-        <p:spPr>
-          <a:xfrm>
-            <a:off x="1080000" y="1526400"/>
-            <a:ext cx="216000" cy="95251"/>
-          </a:xfrm>
-          <a:prstGeom prst="rect">
-            <a:avLst/>
-          </a:prstGeom>
-          <a:noFill/>
-        </p:spPr>
-        <p:txBody>
-          <a:bodyPr wrap="square" lIns="0" rIns="0" tIns="0" bIns="0" anchor="t">
-            <a:spAutoFit/>
-          </a:bodyPr>
-          <a:lstStyle/>
-          <a:p>
-            <a:pPr algn="l">
-              <a:lnSpc>
-                <a:spcPts val="725"/>
-              </a:lnSpc>
-            </a:pPr>
-            <a:r>
-              <a:rPr sz="500" b="1" spc="120">
-                <a:solidFill>
-                  <a:srgbClr val="46332D"/>
-                </a:solidFill>
-                <a:latin typeface="맑은 고딕"/>
-                <a:ea typeface="맑은 고딕"/>
-              </a:rPr>
-              <a:t>MAIL</a:t>
-            </a:r>
-          </a:p>
-        </p:txBody>
-      </p:sp>
-      <p:sp>
-        <p:nvSpPr>
-          <p:cNvPr id="12" name="텍스트"/>
-          <p:cNvSpPr txBox="1"/>
-          <p:nvPr/>
-        </p:nvSpPr>
-        <p:spPr>
-          <a:xfrm>
-            <a:off x="2052000" y="1526400"/>
-            <a:ext cx="216000" cy="95251"/>
-          </a:xfrm>
-          <a:prstGeom prst="rect">
-            <a:avLst/>
-          </a:prstGeom>
-          <a:noFill/>
-        </p:spPr>
-        <p:txBody>
-          <a:bodyPr wrap="square" lIns="0" rIns="0" tIns="0" bIns="0" anchor="t">
-            <a:spAutoFit/>
-          </a:bodyPr>
-          <a:lstStyle/>
-          <a:p>
-            <a:pPr algn="l">
-              <a:lnSpc>
-                <a:spcPts val="725"/>
-              </a:lnSpc>
-            </a:pPr>
-            <a:r>
-              <a:rPr sz="500" b="1" spc="120">
-                <a:solidFill>
-                  <a:srgbClr val="46332D"/>
-                </a:solidFill>
-                <a:latin typeface="맑은 고딕"/>
-                <a:ea typeface="맑은 고딕"/>
-              </a:rPr>
-              <a:t>ADDR</a:t>
             </a:r>
           </a:p>
         </p:txBody>
@@ -3533,18 +3583,226 @@
         <p:nvPr/>
       </p:nvGrpSpPr>
       <p:grpSpPr/>
-      <p:sp>
-        <p:nvSpPr>
-          <p:cNvPr id="2" name="Oval 1"/>
+      <p:cxnSp>
+        <p:nvCxnSpPr>
+          <p:cNvPr id="2" name="Connector 1"/>
+          <p:cNvCxnSpPr/>
+          <p:nvPr/>
+        </p:nvCxnSpPr>
+        <p:spPr>
+          <a:xfrm>
+            <a:off x="93600" y="122400"/>
+            <a:ext cx="57600" cy="0"/>
+          </a:xfrm>
+          <a:prstGeom prst="line">
+            <a:avLst/>
+          </a:prstGeom>
+          <a:ln w="3600">
+            <a:solidFill>
+              <a:srgbClr val="FFE4D6"/>
+            </a:solidFill>
+          </a:ln>
+        </p:spPr>
+      </p:cxnSp>
+      <p:cxnSp>
+        <p:nvCxnSpPr>
+          <p:cNvPr id="3" name="Connector 2"/>
+          <p:cNvCxnSpPr/>
+          <p:nvPr/>
+        </p:nvCxnSpPr>
+        <p:spPr>
+          <a:xfrm>
+            <a:off x="122400" y="93600"/>
+            <a:ext cx="0" cy="57600"/>
+          </a:xfrm>
+          <a:prstGeom prst="line">
+            <a:avLst/>
+          </a:prstGeom>
+          <a:ln w="3600">
+            <a:solidFill>
+              <a:srgbClr val="FFE4D6"/>
+            </a:solidFill>
+          </a:ln>
+        </p:spPr>
+      </p:cxnSp>
+      <p:cxnSp>
+        <p:nvCxnSpPr>
+          <p:cNvPr id="4" name="Connector 3"/>
+          <p:cNvCxnSpPr/>
+          <p:nvPr/>
+        </p:nvCxnSpPr>
+        <p:spPr>
+          <a:xfrm>
+            <a:off x="3088800" y="122400"/>
+            <a:ext cx="57600" cy="0"/>
+          </a:xfrm>
+          <a:prstGeom prst="line">
+            <a:avLst/>
+          </a:prstGeom>
+          <a:ln w="3600">
+            <a:solidFill>
+              <a:srgbClr val="FFE4D6"/>
+            </a:solidFill>
+          </a:ln>
+        </p:spPr>
+      </p:cxnSp>
+      <p:cxnSp>
+        <p:nvCxnSpPr>
+          <p:cNvPr id="5" name="Connector 4"/>
+          <p:cNvCxnSpPr/>
+          <p:nvPr/>
+        </p:nvCxnSpPr>
+        <p:spPr>
+          <a:xfrm>
+            <a:off x="3117600" y="93600"/>
+            <a:ext cx="0" cy="57600"/>
+          </a:xfrm>
+          <a:prstGeom prst="line">
+            <a:avLst/>
+          </a:prstGeom>
+          <a:ln w="3600">
+            <a:solidFill>
+              <a:srgbClr val="FFE4D6"/>
+            </a:solidFill>
+          </a:ln>
+        </p:spPr>
+      </p:cxnSp>
+      <p:cxnSp>
+        <p:nvCxnSpPr>
+          <p:cNvPr id="6" name="Connector 5"/>
+          <p:cNvCxnSpPr/>
+          <p:nvPr/>
+        </p:nvCxnSpPr>
+        <p:spPr>
+          <a:xfrm>
+            <a:off x="93600" y="1677600"/>
+            <a:ext cx="57600" cy="0"/>
+          </a:xfrm>
+          <a:prstGeom prst="line">
+            <a:avLst/>
+          </a:prstGeom>
+          <a:ln w="3600">
+            <a:solidFill>
+              <a:srgbClr val="FFE4D6"/>
+            </a:solidFill>
+          </a:ln>
+        </p:spPr>
+      </p:cxnSp>
+      <p:cxnSp>
+        <p:nvCxnSpPr>
+          <p:cNvPr id="7" name="Connector 6"/>
+          <p:cNvCxnSpPr/>
+          <p:nvPr/>
+        </p:nvCxnSpPr>
+        <p:spPr>
+          <a:xfrm>
+            <a:off x="122400" y="1648800"/>
+            <a:ext cx="0" cy="57600"/>
+          </a:xfrm>
+          <a:prstGeom prst="line">
+            <a:avLst/>
+          </a:prstGeom>
+          <a:ln w="3600">
+            <a:solidFill>
+              <a:srgbClr val="FFE4D6"/>
+            </a:solidFill>
+          </a:ln>
+        </p:spPr>
+      </p:cxnSp>
+      <p:cxnSp>
+        <p:nvCxnSpPr>
+          <p:cNvPr id="8" name="Connector 7"/>
+          <p:cNvCxnSpPr/>
+          <p:nvPr/>
+        </p:nvCxnSpPr>
+        <p:spPr>
+          <a:xfrm>
+            <a:off x="3088800" y="1677600"/>
+            <a:ext cx="57600" cy="0"/>
+          </a:xfrm>
+          <a:prstGeom prst="line">
+            <a:avLst/>
+          </a:prstGeom>
+          <a:ln w="3600">
+            <a:solidFill>
+              <a:srgbClr val="FFE4D6"/>
+            </a:solidFill>
+          </a:ln>
+        </p:spPr>
+      </p:cxnSp>
+      <p:cxnSp>
+        <p:nvCxnSpPr>
+          <p:cNvPr id="9" name="Connector 8"/>
+          <p:cNvCxnSpPr/>
+          <p:nvPr/>
+        </p:nvCxnSpPr>
+        <p:spPr>
+          <a:xfrm>
+            <a:off x="3117600" y="1648800"/>
+            <a:ext cx="0" cy="57600"/>
+          </a:xfrm>
+          <a:prstGeom prst="line">
+            <a:avLst/>
+          </a:prstGeom>
+          <a:ln w="3600">
+            <a:solidFill>
+              <a:srgbClr val="FFE4D6"/>
+            </a:solidFill>
+          </a:ln>
+        </p:spPr>
+      </p:cxnSp>
+      <p:sp>
+        <p:nvSpPr>
+          <p:cNvPr id="10" name="텍스트"/>
+          <p:cNvSpPr txBox="1"/>
+          <p:nvPr/>
+        </p:nvSpPr>
+        <p:spPr>
+          <a:xfrm>
+            <a:off x="360000" y="331200"/>
+            <a:ext cx="2520000" cy="99061"/>
+          </a:xfrm>
+          <a:prstGeom prst="rect">
+            <a:avLst/>
+          </a:prstGeom>
+          <a:noFill/>
+        </p:spPr>
+        <p:txBody>
+          <a:bodyPr wrap="square" lIns="0" rIns="0" tIns="0" bIns="0" anchor="t">
+            <a:spAutoFit/>
+          </a:bodyPr>
+          <a:lstStyle/>
+          <a:p>
+            <a:pPr algn="ctr">
+              <a:lnSpc>
+                <a:spcPts val="754"/>
+              </a:lnSpc>
+            </a:pPr>
+            <a:r>
+              <a:rPr sz="520" b="1" spc="240">
+                <a:solidFill>
+                  <a:srgbClr val="6C493A"/>
+                </a:solidFill>
+                <a:latin typeface="맑은 고딕"/>
+                <a:ea typeface="맑은 고딕"/>
+              </a:rPr>
+              <a:t>담당 업무</a:t>
+            </a:r>
+          </a:p>
+        </p:txBody>
+      </p:sp>
+      <p:sp>
+        <p:nvSpPr>
+          <p:cNvPr id="11" name="Rectangle 10"/>
           <p:cNvSpPr/>
           <p:nvPr/>
         </p:nvSpPr>
         <p:spPr>
           <a:xfrm>
-            <a:off x="1591200" y="511200"/>
-            <a:ext cx="57600" cy="57600"/>
-          </a:xfrm>
-          <a:prstGeom prst="ellipse">
+            <a:off x="1530000" y="453600"/>
+            <a:ext cx="180000" cy="14400"/>
+          </a:xfrm>
+          <a:prstGeom prst="rect">
             <a:avLst/>
           </a:prstGeom>
           <a:solidFill>
@@ -3564,14 +3822,14 @@
       </p:sp>
       <p:sp>
         <p:nvSpPr>
-          <p:cNvPr id="3" name="텍스트"/>
+          <p:cNvPr id="12" name="텍스트"/>
           <p:cNvSpPr txBox="1"/>
           <p:nvPr/>
         </p:nvSpPr>
         <p:spPr>
           <a:xfrm>
-            <a:off x="396000" y="684000"/>
-            <a:ext cx="2448000" cy="504000"/>
+            <a:off x="360000" y="684000"/>
+            <a:ext cx="630000" cy="216000"/>
           </a:xfrm>
           <a:prstGeom prst="rect">
             <a:avLst/>
@@ -3579,38 +3837,322 @@
           <a:noFill/>
         </p:spPr>
         <p:txBody>
-          <a:bodyPr wrap="square" lIns="0" rIns="0" tIns="0" bIns="0" anchor="t">
+          <a:bodyPr wrap="square" lIns="0" rIns="0" tIns="0" bIns="0" anchor="ctr">
             <a:spAutoFit/>
           </a:bodyPr>
           <a:lstStyle/>
           <a:p>
             <a:pPr algn="ctr">
               <a:lnSpc>
-                <a:spcPts val="1739"/>
+                <a:spcPts val="1015"/>
               </a:lnSpc>
             </a:pPr>
             <a:r>
-              <a:rPr sz="1200" b="1">
+              <a:rPr sz="700" b="1">
                 <a:solidFill>
                   <a:srgbClr val="12151C"/>
                 </a:solidFill>
                 <a:latin typeface="맑은 고딕"/>
                 <a:ea typeface="맑은 고딕"/>
               </a:rPr>
-              <a:t>국민 곁에서 한결같이 일합니다</a:t>
-            </a:r>
-          </a:p>
-        </p:txBody>
-      </p:sp>
-      <p:sp>
-        <p:nvSpPr>
-          <p:cNvPr id="4" name="텍스트"/>
+              <a:t>주민 서비스</a:t>
+            </a:r>
+          </a:p>
+        </p:txBody>
+      </p:sp>
+      <p:sp>
+        <p:nvSpPr>
+          <p:cNvPr id="13" name="텍스트"/>
           <p:cNvSpPr txBox="1"/>
           <p:nvPr/>
         </p:nvSpPr>
         <p:spPr>
           <a:xfrm>
-            <a:off x="360000" y="1339200"/>
+            <a:off x="990000" y="684000"/>
+            <a:ext cx="630000" cy="216000"/>
+          </a:xfrm>
+          <a:prstGeom prst="rect">
+            <a:avLst/>
+          </a:prstGeom>
+          <a:noFill/>
+        </p:spPr>
+        <p:txBody>
+          <a:bodyPr wrap="square" lIns="0" rIns="0" tIns="0" bIns="0" anchor="ctr">
+            <a:spAutoFit/>
+          </a:bodyPr>
+          <a:lstStyle/>
+          <a:p>
+            <a:pPr algn="ctr">
+              <a:lnSpc>
+                <a:spcPts val="1015"/>
+              </a:lnSpc>
+            </a:pPr>
+            <a:r>
+              <a:rPr sz="700" b="1">
+                <a:solidFill>
+                  <a:srgbClr val="12151C"/>
+                </a:solidFill>
+                <a:latin typeface="맑은 고딕"/>
+                <a:ea typeface="맑은 고딕"/>
+              </a:rPr>
+              <a:t>안전 관리</a:t>
+            </a:r>
+          </a:p>
+        </p:txBody>
+      </p:sp>
+      <p:cxnSp>
+        <p:nvCxnSpPr>
+          <p:cNvPr id="14" name="Connector 13"/>
+          <p:cNvCxnSpPr/>
+          <p:nvPr/>
+        </p:nvCxnSpPr>
+        <p:spPr>
+          <a:xfrm>
+            <a:off x="990000" y="676800"/>
+            <a:ext cx="0" cy="230400"/>
+          </a:xfrm>
+          <a:prstGeom prst="line">
+            <a:avLst/>
+          </a:prstGeom>
+          <a:ln w="3600">
+            <a:solidFill>
+              <a:srgbClr val="FFE4D6"/>
+            </a:solidFill>
+          </a:ln>
+        </p:spPr>
+      </p:cxnSp>
+      <p:sp>
+        <p:nvSpPr>
+          <p:cNvPr id="15" name="텍스트"/>
+          <p:cNvSpPr txBox="1"/>
+          <p:nvPr/>
+        </p:nvSpPr>
+        <p:spPr>
+          <a:xfrm>
+            <a:off x="1620000" y="684000"/>
+            <a:ext cx="630000" cy="216000"/>
+          </a:xfrm>
+          <a:prstGeom prst="rect">
+            <a:avLst/>
+          </a:prstGeom>
+          <a:noFill/>
+        </p:spPr>
+        <p:txBody>
+          <a:bodyPr wrap="square" lIns="0" rIns="0" tIns="0" bIns="0" anchor="ctr">
+            <a:spAutoFit/>
+          </a:bodyPr>
+          <a:lstStyle/>
+          <a:p>
+            <a:pPr algn="ctr">
+              <a:lnSpc>
+                <a:spcPts val="1015"/>
+              </a:lnSpc>
+            </a:pPr>
+            <a:r>
+              <a:rPr sz="700" b="1">
+                <a:solidFill>
+                  <a:srgbClr val="12151C"/>
+                </a:solidFill>
+                <a:latin typeface="맑은 고딕"/>
+                <a:ea typeface="맑은 고딕"/>
+              </a:rPr>
+              <a:t>교통 안내</a:t>
+            </a:r>
+          </a:p>
+        </p:txBody>
+      </p:sp>
+      <p:cxnSp>
+        <p:nvCxnSpPr>
+          <p:cNvPr id="16" name="Connector 15"/>
+          <p:cNvCxnSpPr/>
+          <p:nvPr/>
+        </p:nvCxnSpPr>
+        <p:spPr>
+          <a:xfrm>
+            <a:off x="1620000" y="676800"/>
+            <a:ext cx="0" cy="230400"/>
+          </a:xfrm>
+          <a:prstGeom prst="line">
+            <a:avLst/>
+          </a:prstGeom>
+          <a:ln w="3600">
+            <a:solidFill>
+              <a:srgbClr val="FFE4D6"/>
+            </a:solidFill>
+          </a:ln>
+        </p:spPr>
+      </p:cxnSp>
+      <p:sp>
+        <p:nvSpPr>
+          <p:cNvPr id="17" name="텍스트"/>
+          <p:cNvSpPr txBox="1"/>
+          <p:nvPr/>
+        </p:nvSpPr>
+        <p:spPr>
+          <a:xfrm>
+            <a:off x="2250000" y="684000"/>
+            <a:ext cx="630000" cy="216000"/>
+          </a:xfrm>
+          <a:prstGeom prst="rect">
+            <a:avLst/>
+          </a:prstGeom>
+          <a:noFill/>
+        </p:spPr>
+        <p:txBody>
+          <a:bodyPr wrap="square" lIns="0" rIns="0" tIns="0" bIns="0" anchor="ctr">
+            <a:spAutoFit/>
+          </a:bodyPr>
+          <a:lstStyle/>
+          <a:p>
+            <a:pPr algn="ctr">
+              <a:lnSpc>
+                <a:spcPts val="1015"/>
+              </a:lnSpc>
+            </a:pPr>
+            <a:r>
+              <a:rPr sz="700" b="1">
+                <a:solidFill>
+                  <a:srgbClr val="12151C"/>
+                </a:solidFill>
+                <a:latin typeface="맑은 고딕"/>
+                <a:ea typeface="맑은 고딕"/>
+              </a:rPr>
+              <a:t>허가 · 신고</a:t>
+            </a:r>
+          </a:p>
+        </p:txBody>
+      </p:sp>
+      <p:cxnSp>
+        <p:nvCxnSpPr>
+          <p:cNvPr id="18" name="Connector 17"/>
+          <p:cNvCxnSpPr/>
+          <p:nvPr/>
+        </p:nvCxnSpPr>
+        <p:spPr>
+          <a:xfrm>
+            <a:off x="2250000" y="676800"/>
+            <a:ext cx="0" cy="230400"/>
+          </a:xfrm>
+          <a:prstGeom prst="line">
+            <a:avLst/>
+          </a:prstGeom>
+          <a:ln w="3600">
+            <a:solidFill>
+              <a:srgbClr val="FFE4D6"/>
+            </a:solidFill>
+          </a:ln>
+        </p:spPr>
+      </p:cxnSp>
+      <p:cxnSp>
+        <p:nvCxnSpPr>
+          <p:cNvPr id="19" name="Connector 18"/>
+          <p:cNvCxnSpPr/>
+          <p:nvPr/>
+        </p:nvCxnSpPr>
+        <p:spPr>
+          <a:xfrm>
+            <a:off x="360000" y="1159200"/>
+            <a:ext cx="2520000" cy="0"/>
+          </a:xfrm>
+          <a:prstGeom prst="line">
+            <a:avLst/>
+          </a:prstGeom>
+          <a:ln w="3600">
+            <a:solidFill>
+              <a:srgbClr val="FFE4D6"/>
+            </a:solidFill>
+          </a:ln>
+        </p:spPr>
+      </p:cxnSp>
+      <p:sp>
+        <p:nvSpPr>
+          <p:cNvPr id="20" name="텍스트"/>
+          <p:cNvSpPr txBox="1"/>
+          <p:nvPr/>
+        </p:nvSpPr>
+        <p:spPr>
+          <a:xfrm>
+            <a:off x="360000" y="1245600"/>
+            <a:ext cx="1224000" cy="118111"/>
+          </a:xfrm>
+          <a:prstGeom prst="rect">
+            <a:avLst/>
+          </a:prstGeom>
+          <a:noFill/>
+        </p:spPr>
+        <p:txBody>
+          <a:bodyPr wrap="square" lIns="0" rIns="0" tIns="0" bIns="0" anchor="t">
+            <a:spAutoFit/>
+          </a:bodyPr>
+          <a:lstStyle/>
+          <a:p>
+            <a:pPr algn="ctr">
+              <a:lnSpc>
+                <a:spcPts val="899"/>
+              </a:lnSpc>
+            </a:pPr>
+            <a:r>
+              <a:rPr sz="620" b="0">
+                <a:solidFill>
+                  <a:srgbClr val="12151C"/>
+                </a:solidFill>
+                <a:latin typeface="맑은 고딕"/>
+                <a:ea typeface="맑은 고딕"/>
+              </a:rPr>
+              <a:t>평일 09:00 – 18:00</a:t>
+            </a:r>
+          </a:p>
+        </p:txBody>
+      </p:sp>
+      <p:sp>
+        <p:nvSpPr>
+          <p:cNvPr id="21" name="텍스트"/>
+          <p:cNvSpPr txBox="1"/>
+          <p:nvPr/>
+        </p:nvSpPr>
+        <p:spPr>
+          <a:xfrm>
+            <a:off x="1656000" y="1245600"/>
+            <a:ext cx="1224000" cy="118111"/>
+          </a:xfrm>
+          <a:prstGeom prst="rect">
+            <a:avLst/>
+          </a:prstGeom>
+          <a:noFill/>
+        </p:spPr>
+        <p:txBody>
+          <a:bodyPr wrap="square" lIns="0" rIns="0" tIns="0" bIns="0" anchor="t">
+            <a:spAutoFit/>
+          </a:bodyPr>
+          <a:lstStyle/>
+          <a:p>
+            <a:pPr algn="ctr">
+              <a:lnSpc>
+                <a:spcPts val="899"/>
+              </a:lnSpc>
+            </a:pPr>
+            <a:r>
+              <a:rPr sz="620" b="0">
+                <a:solidFill>
+                  <a:srgbClr val="12151C"/>
+                </a:solidFill>
+                <a:latin typeface="맑은 고딕"/>
+                <a:ea typeface="맑은 고딕"/>
+              </a:rPr>
+              <a:t>INSTAGRAM  @아이디</a:t>
+            </a:r>
+          </a:p>
+        </p:txBody>
+      </p:sp>
+      <p:sp>
+        <p:nvSpPr>
+          <p:cNvPr id="22" name="텍스트"/>
+          <p:cNvSpPr txBox="1"/>
+          <p:nvPr/>
+        </p:nvSpPr>
+        <p:spPr>
+          <a:xfrm>
+            <a:off x="360000" y="1526400"/>
             <a:ext cx="2520000" cy="123826"/>
           </a:xfrm>
           <a:prstGeom prst="rect">
@@ -3630,7 +4172,7 @@
               </a:lnSpc>
             </a:pPr>
             <a:r>
-              <a:rPr sz="650" b="1" spc="300">
+              <a:rPr sz="650" b="1" spc="220">
                 <a:solidFill>
                   <a:srgbClr val="6C493A"/>
                 </a:solidFill>
